--- a/dist/초1/수학/시간과규칙/초1_수학_시간과규칙_02_규칙찾기_학생용.pptx
+++ b/dist/초1/수학/시간과규칙/초1_수학_시간과규칙_02_규칙찾기_학생용.pptx
@@ -120,13 +120,13 @@
   <p:extLst>
     <p:ext uri="{521415D9-36F7-43E2-AB2F-B90AF26B5E84}">
       <p14:sectionLst xmlns:p14="http://schemas.microsoft.com/office/powerpoint/2010/main">
-        <p14:section name="도입" id="{7c4e43c9-307b-2940-abb1-780a35d2d7e3}">
+        <p14:section name="도입" id="{b396bdad-75c5-a1e2-b555-12fe4428b8e1}">
           <p14:sldIdLst>
             <p14:sldId id="256"/>
             <p14:sldId id="257"/>
           </p14:sldIdLst>
         </p14:section>
-        <p14:section name="개념" id="{4140df89-de01-448c-4c2c-695f025c2094}">
+        <p14:section name="개념" id="{1e6b7e12-c40b-e88d-5546-e4404a73494b}">
           <p14:sldIdLst>
             <p14:sldId id="258"/>
             <p14:sldId id="259"/>
@@ -134,7 +134,7 @@
             <p14:sldId id="263"/>
           </p14:sldIdLst>
         </p14:section>
-        <p14:section name="연습" id="{8694d392-328e-055a-670d-cdc694fbbc43}">
+        <p14:section name="연습" id="{b0622710-9f41-e694-d221-7de050e79346}">
           <p14:sldIdLst>
             <p14:sldId id="261"/>
             <p14:sldId id="262"/>
@@ -142,24 +142,24 @@
             <p14:sldId id="265"/>
           </p14:sldIdLst>
         </p14:section>
-        <p14:section name="개념" id="{53b49558-6b12-5d49-53ef-b1cb47e49c35}">
+        <p14:section name="개념" id="{6f8dd114-ad76-3349-363e-9b96e05a726c}">
           <p14:sldIdLst/>
         </p14:section>
-        <p14:section name="연습" id="{366b66b1-e93f-2a57-49d3-2968732d9309}">
+        <p14:section name="연습" id="{a62848d6-76f7-61e3-e410-956a5364557d}">
           <p14:sldIdLst/>
         </p14:section>
-        <p14:section name="확인" id="{b4a3ad88-d6f1-8ac2-3569-944e61d8506f}">
+        <p14:section name="확인" id="{2ca235ef-2607-842a-9a7a-dd6be451974d}">
           <p14:sldIdLst>
             <p14:sldId id="266"/>
             <p14:sldId id="267"/>
           </p14:sldIdLst>
         </p14:section>
-        <p14:section name="정리" id="{e6d01cc0-a14d-cf6a-e84a-bdc2450dee4b}">
+        <p14:section name="정리" id="{e5fa715b-ccdf-830b-1c19-1312c22e2ae6}">
           <p14:sldIdLst>
             <p14:sldId id="268"/>
           </p14:sldIdLst>
         </p14:section>
-        <p14:section name="보충" id="{a1c1fbab-09c9-412c-a111-45d0ae691f51}">
+        <p14:section name="보충" id="{579caf2b-87f4-edcf-13bd-a4252ba4b859}">
           <p14:sldIdLst>
             <p14:sldId id="269"/>
           </p14:sldIdLst>

--- a/dist/초1/수학/시간과규칙/초1_수학_시간과규칙_02_규칙찾기_학생용.pptx
+++ b/dist/초1/수학/시간과규칙/초1_수학_시간과규칙_02_규칙찾기_학생용.pptx
@@ -120,13 +120,13 @@
   <p:extLst>
     <p:ext uri="{521415D9-36F7-43E2-AB2F-B90AF26B5E84}">
       <p14:sectionLst xmlns:p14="http://schemas.microsoft.com/office/powerpoint/2010/main">
-        <p14:section name="도입" id="{b396bdad-75c5-a1e2-b555-12fe4428b8e1}">
+        <p14:section name="도입" id="{c4216147-11aa-cf61-c4fa-bc0778074ef0}">
           <p14:sldIdLst>
             <p14:sldId id="256"/>
             <p14:sldId id="257"/>
           </p14:sldIdLst>
         </p14:section>
-        <p14:section name="개념" id="{1e6b7e12-c40b-e88d-5546-e4404a73494b}">
+        <p14:section name="개념" id="{2928adeb-cb0f-1ae4-f8fc-5970424ec488}">
           <p14:sldIdLst>
             <p14:sldId id="258"/>
             <p14:sldId id="259"/>
@@ -134,7 +134,7 @@
             <p14:sldId id="263"/>
           </p14:sldIdLst>
         </p14:section>
-        <p14:section name="연습" id="{b0622710-9f41-e694-d221-7de050e79346}">
+        <p14:section name="연습" id="{1e5c02d8-7762-9ae3-5527-134e6a6cef88}">
           <p14:sldIdLst>
             <p14:sldId id="261"/>
             <p14:sldId id="262"/>
@@ -142,24 +142,24 @@
             <p14:sldId id="265"/>
           </p14:sldIdLst>
         </p14:section>
-        <p14:section name="개념" id="{6f8dd114-ad76-3349-363e-9b96e05a726c}">
+        <p14:section name="개념" id="{a3bf97bd-4690-6c6d-1216-ca42e6465b62}">
           <p14:sldIdLst/>
         </p14:section>
-        <p14:section name="연습" id="{a62848d6-76f7-61e3-e410-956a5364557d}">
+        <p14:section name="연습" id="{6161b6a7-97aa-fe8a-db15-08fd7703fc29}">
           <p14:sldIdLst/>
         </p14:section>
-        <p14:section name="확인" id="{2ca235ef-2607-842a-9a7a-dd6be451974d}">
+        <p14:section name="확인" id="{4153aa35-5e70-bacf-bab0-588c8065e21a}">
           <p14:sldIdLst>
             <p14:sldId id="266"/>
             <p14:sldId id="267"/>
           </p14:sldIdLst>
         </p14:section>
-        <p14:section name="정리" id="{e5fa715b-ccdf-830b-1c19-1312c22e2ae6}">
+        <p14:section name="정리" id="{55541e6f-72ef-6d46-0fdc-6859de6d677c}">
           <p14:sldIdLst>
             <p14:sldId id="268"/>
           </p14:sldIdLst>
         </p14:section>
-        <p14:section name="보충" id="{579caf2b-87f4-edcf-13bd-a4252ba4b859}">
+        <p14:section name="보충" id="{584d3315-823d-0032-5c97-ed1950cd117b}">
           <p14:sldIdLst>
             <p14:sldId id="269"/>
           </p14:sldIdLst>
